--- a/dist/초1/수학/시간과규칙/초1_수학_시간과규칙_03_수배열의규칙.pptx
+++ b/dist/초1/수학/시간과규칙/초1_수학_시간과규칙_03_수배열의규칙.pptx
@@ -120,13 +120,13 @@
   <p:extLst>
     <p:ext uri="{521415D9-36F7-43E2-AB2F-B90AF26B5E84}">
       <p14:sectionLst xmlns:p14="http://schemas.microsoft.com/office/powerpoint/2010/main">
-        <p14:section name="도입" id="{18bce4ba-3290-0dbd-8079-82a65257a565}">
+        <p14:section name="도입" id="{b5ced73a-0bc4-2098-0c18-0791f75177b8}">
           <p14:sldIdLst>
             <p14:sldId id="256"/>
             <p14:sldId id="257"/>
           </p14:sldIdLst>
         </p14:section>
-        <p14:section name="개념" id="{fa5e019b-ef58-6fba-eada-a153f080783d}">
+        <p14:section name="개념" id="{1dfe3bb4-0b3e-ff11-67c8-35c2003317d5}">
           <p14:sldIdLst>
             <p14:sldId id="258"/>
             <p14:sldId id="259"/>
@@ -134,32 +134,32 @@
             <p14:sldId id="263"/>
           </p14:sldIdLst>
         </p14:section>
-        <p14:section name="연습" id="{d6fea189-53ea-1d4d-f97d-bce589e83386}">
+        <p14:section name="연습" id="{da7af4c3-8e06-3db2-3d02-de81461e33ee}">
           <p14:sldIdLst>
             <p14:sldId id="260"/>
             <p14:sldId id="261"/>
             <p14:sldId id="264"/>
           </p14:sldIdLst>
         </p14:section>
-        <p14:section name="개념" id="{6413ba9c-f33d-1495-65ec-2cf526feb399}">
+        <p14:section name="개념" id="{886f25e1-b157-7727-8105-99574e70688b}">
           <p14:sldIdLst/>
         </p14:section>
-        <p14:section name="연습" id="{872c2278-3cf1-bb3c-1425-9fc575f9c4a4}">
+        <p14:section name="연습" id="{7023c3ec-b8d0-8e19-80b0-0fb5d3285c94}">
           <p14:sldIdLst/>
         </p14:section>
-        <p14:section name="확인" id="{16d2629b-9318-54fd-bc49-9554c3000c7a}">
+        <p14:section name="확인" id="{8d575d6b-3c84-4f19-7d53-89fedb7da964}">
           <p14:sldIdLst>
             <p14:sldId id="265"/>
             <p14:sldId id="266"/>
             <p14:sldId id="267"/>
           </p14:sldIdLst>
         </p14:section>
-        <p14:section name="정리" id="{7a87ea43-8247-7cf8-05f4-37277fe0b9ce}">
+        <p14:section name="정리" id="{a542765d-dc98-e17e-0842-6bebd8f7381f}">
           <p14:sldIdLst>
             <p14:sldId id="268"/>
           </p14:sldIdLst>
         </p14:section>
-        <p14:section name="보충" id="{ee19ae88-aa34-80b9-f265-b0d6f81d2fba}">
+        <p14:section name="보충" id="{b91ddbfb-a53b-1e09-f82c-d25c57620306}">
           <p14:sldIdLst>
             <p14:sldId id="269"/>
           </p14:sldIdLst>
@@ -5888,7 +5888,7 @@
                 <a:ea typeface="맑은 고딕" pitchFamily="34" charset="-122"/>
                 <a:cs typeface="맑은 고딕" pitchFamily="34" charset="-120"/>
               </a:rPr>
-              <a:t>보충: 1 큰 수, 10 큰 수</a:t>
+              <a:t>보충: 묶음과 낱개</a:t>
             </a:r>
             <a:endParaRPr lang="ko-KR" sz="4400" dirty="0"/>
           </a:p>

--- a/dist/초1/수학/시간과규칙/초1_수학_시간과규칙_03_수배열의규칙.pptx
+++ b/dist/초1/수학/시간과규칙/초1_수학_시간과규칙_03_수배열의규칙.pptx
@@ -120,13 +120,13 @@
   <p:extLst>
     <p:ext uri="{521415D9-36F7-43E2-AB2F-B90AF26B5E84}">
       <p14:sectionLst xmlns:p14="http://schemas.microsoft.com/office/powerpoint/2010/main">
-        <p14:section name="도입" id="{b5ced73a-0bc4-2098-0c18-0791f75177b8}">
+        <p14:section name="도입" id="{3864fda2-82bd-7087-af71-f8498e24277d}">
           <p14:sldIdLst>
             <p14:sldId id="256"/>
             <p14:sldId id="257"/>
           </p14:sldIdLst>
         </p14:section>
-        <p14:section name="개념" id="{1dfe3bb4-0b3e-ff11-67c8-35c2003317d5}">
+        <p14:section name="개념" id="{655a5be0-6e5b-6744-53e7-ffc7bf63012e}">
           <p14:sldIdLst>
             <p14:sldId id="258"/>
             <p14:sldId id="259"/>
@@ -134,32 +134,32 @@
             <p14:sldId id="263"/>
           </p14:sldIdLst>
         </p14:section>
-        <p14:section name="연습" id="{da7af4c3-8e06-3db2-3d02-de81461e33ee}">
+        <p14:section name="연습" id="{f0978564-d73e-6eae-f29a-00e4f24afb96}">
           <p14:sldIdLst>
             <p14:sldId id="260"/>
             <p14:sldId id="261"/>
             <p14:sldId id="264"/>
           </p14:sldIdLst>
         </p14:section>
-        <p14:section name="개념" id="{886f25e1-b157-7727-8105-99574e70688b}">
+        <p14:section name="개념" id="{5241e6c6-3478-4f14-91eb-949523a6a769}">
           <p14:sldIdLst/>
         </p14:section>
-        <p14:section name="연습" id="{7023c3ec-b8d0-8e19-80b0-0fb5d3285c94}">
+        <p14:section name="연습" id="{c05357ed-e7bf-3e7a-6c11-9d45016a0a83}">
           <p14:sldIdLst/>
         </p14:section>
-        <p14:section name="확인" id="{8d575d6b-3c84-4f19-7d53-89fedb7da964}">
+        <p14:section name="확인" id="{af571d9f-5e15-2bf6-519b-89a04457a5dc}">
           <p14:sldIdLst>
             <p14:sldId id="265"/>
             <p14:sldId id="266"/>
             <p14:sldId id="267"/>
           </p14:sldIdLst>
         </p14:section>
-        <p14:section name="정리" id="{a542765d-dc98-e17e-0842-6bebd8f7381f}">
+        <p14:section name="정리" id="{1a87f0ca-1f1e-a9c6-4401-ce6cd706ba7d}">
           <p14:sldIdLst>
             <p14:sldId id="268"/>
           </p14:sldIdLst>
         </p14:section>
-        <p14:section name="보충" id="{b91ddbfb-a53b-1e09-f82c-d25c57620306}">
+        <p14:section name="보충" id="{c87c9420-dcc9-f708-58d9-3f7fb8dff7be}">
           <p14:sldIdLst>
             <p14:sldId id="269"/>
           </p14:sldIdLst>

--- a/dist/초1/수학/시간과규칙/초1_수학_시간과규칙_03_수배열의규칙.pptx
+++ b/dist/초1/수학/시간과규칙/초1_수학_시간과규칙_03_수배열의규칙.pptx
@@ -120,13 +120,13 @@
   <p:extLst>
     <p:ext uri="{521415D9-36F7-43E2-AB2F-B90AF26B5E84}">
       <p14:sectionLst xmlns:p14="http://schemas.microsoft.com/office/powerpoint/2010/main">
-        <p14:section name="도입" id="{3864fda2-82bd-7087-af71-f8498e24277d}">
+        <p14:section name="도입" id="{41b48d14-d996-a10a-e759-a5f693bdcd68}">
           <p14:sldIdLst>
             <p14:sldId id="256"/>
             <p14:sldId id="257"/>
           </p14:sldIdLst>
         </p14:section>
-        <p14:section name="개념" id="{655a5be0-6e5b-6744-53e7-ffc7bf63012e}">
+        <p14:section name="개념" id="{b0dbafd6-aa95-f0b9-5b23-b94567136a85}">
           <p14:sldIdLst>
             <p14:sldId id="258"/>
             <p14:sldId id="259"/>
@@ -134,32 +134,32 @@
             <p14:sldId id="263"/>
           </p14:sldIdLst>
         </p14:section>
-        <p14:section name="연습" id="{f0978564-d73e-6eae-f29a-00e4f24afb96}">
+        <p14:section name="연습" id="{a4d4d28a-c23e-68f6-d0dc-c9b469467743}">
           <p14:sldIdLst>
             <p14:sldId id="260"/>
             <p14:sldId id="261"/>
             <p14:sldId id="264"/>
           </p14:sldIdLst>
         </p14:section>
-        <p14:section name="개념" id="{5241e6c6-3478-4f14-91eb-949523a6a769}">
+        <p14:section name="개념" id="{d6340542-02f5-be15-0cb4-b63b0c799022}">
           <p14:sldIdLst/>
         </p14:section>
-        <p14:section name="연습" id="{c05357ed-e7bf-3e7a-6c11-9d45016a0a83}">
+        <p14:section name="연습" id="{81f473db-75be-1f14-4812-7e89296ef44b}">
           <p14:sldIdLst/>
         </p14:section>
-        <p14:section name="확인" id="{af571d9f-5e15-2bf6-519b-89a04457a5dc}">
+        <p14:section name="확인" id="{686233b3-4055-32de-ccc4-d6b2ac8ff917}">
           <p14:sldIdLst>
             <p14:sldId id="265"/>
             <p14:sldId id="266"/>
             <p14:sldId id="267"/>
           </p14:sldIdLst>
         </p14:section>
-        <p14:section name="정리" id="{1a87f0ca-1f1e-a9c6-4401-ce6cd706ba7d}">
+        <p14:section name="정리" id="{ee3136b9-0c4d-0c25-7f68-8ae975e6c109}">
           <p14:sldIdLst>
             <p14:sldId id="268"/>
           </p14:sldIdLst>
         </p14:section>
-        <p14:section name="보충" id="{c87c9420-dcc9-f708-58d9-3f7fb8dff7be}">
+        <p14:section name="보충" id="{6ddf00b3-f0b4-8d03-155a-0657b5acdb99}">
           <p14:sldIdLst>
             <p14:sldId id="269"/>
           </p14:sldIdLst>
@@ -5902,12 +5902,12 @@
         </p:nvSpPr>
         <p:spPr>
           <a:xfrm>
-            <a:off x="548640" y="5349240"/>
-            <a:ext cx="11091672" cy="868680"/>
+            <a:off x="548640" y="4897120"/>
+            <a:ext cx="11091672" cy="1320800"/>
           </a:xfrm>
           <a:prstGeom prst="roundRect">
             <a:avLst>
-              <a:gd name="adj" fmla="val 12632"/>
+              <a:gd name="adj" fmla="val 8308"/>
             </a:avLst>
           </a:prstGeom>
           <a:solidFill>
@@ -5929,8 +5929,8 @@
         </p:nvSpPr>
         <p:spPr>
           <a:xfrm>
-            <a:off x="822960" y="5486400"/>
-            <a:ext cx="10543032" cy="594360"/>
+            <a:off x="822960" y="5034280"/>
+            <a:ext cx="10543032" cy="1046480"/>
           </a:xfrm>
           <a:prstGeom prst="rect">
             <a:avLst/>
@@ -5971,8 +5971,8 @@
         </p:nvSpPr>
         <p:spPr>
           <a:xfrm>
-            <a:off x="1453896" y="1592199"/>
-            <a:ext cx="274320" cy="2743200"/>
+            <a:off x="1462462" y="1380182"/>
+            <a:ext cx="271511" cy="2715113"/>
           </a:xfrm>
           <a:prstGeom prst="rect">
             <a:avLst/>
@@ -5996,8 +5996,8 @@
         </p:nvSpPr>
         <p:spPr>
           <a:xfrm>
-            <a:off x="1453896" y="1866519"/>
-            <a:ext cx="274320" cy="0"/>
+            <a:off x="1462462" y="1651694"/>
+            <a:ext cx="271511" cy="0"/>
           </a:xfrm>
           <a:prstGeom prst="line">
             <a:avLst/>
@@ -6019,8 +6019,8 @@
         </p:nvSpPr>
         <p:spPr>
           <a:xfrm>
-            <a:off x="1453896" y="2140839"/>
-            <a:ext cx="274320" cy="0"/>
+            <a:off x="1462462" y="1923205"/>
+            <a:ext cx="271511" cy="0"/>
           </a:xfrm>
           <a:prstGeom prst="line">
             <a:avLst/>
@@ -6042,8 +6042,8 @@
         </p:nvSpPr>
         <p:spPr>
           <a:xfrm>
-            <a:off x="1453896" y="2415159"/>
-            <a:ext cx="274320" cy="0"/>
+            <a:off x="1462462" y="2194716"/>
+            <a:ext cx="271511" cy="0"/>
           </a:xfrm>
           <a:prstGeom prst="line">
             <a:avLst/>
@@ -6065,8 +6065,8 @@
         </p:nvSpPr>
         <p:spPr>
           <a:xfrm>
-            <a:off x="1453896" y="2689479"/>
-            <a:ext cx="274320" cy="0"/>
+            <a:off x="1462462" y="2466228"/>
+            <a:ext cx="271511" cy="0"/>
           </a:xfrm>
           <a:prstGeom prst="line">
             <a:avLst/>
@@ -6088,8 +6088,8 @@
         </p:nvSpPr>
         <p:spPr>
           <a:xfrm>
-            <a:off x="1453896" y="2963799"/>
-            <a:ext cx="274320" cy="0"/>
+            <a:off x="1462462" y="2737739"/>
+            <a:ext cx="271511" cy="0"/>
           </a:xfrm>
           <a:prstGeom prst="line">
             <a:avLst/>
@@ -6111,8 +6111,8 @@
         </p:nvSpPr>
         <p:spPr>
           <a:xfrm>
-            <a:off x="1453896" y="3238119"/>
-            <a:ext cx="274320" cy="0"/>
+            <a:off x="1462462" y="3009250"/>
+            <a:ext cx="271511" cy="0"/>
           </a:xfrm>
           <a:prstGeom prst="line">
             <a:avLst/>
@@ -6134,8 +6134,8 @@
         </p:nvSpPr>
         <p:spPr>
           <a:xfrm>
-            <a:off x="1453896" y="3512439"/>
-            <a:ext cx="274320" cy="0"/>
+            <a:off x="1462462" y="3280762"/>
+            <a:ext cx="271511" cy="0"/>
           </a:xfrm>
           <a:prstGeom prst="line">
             <a:avLst/>
@@ -6157,8 +6157,8 @@
         </p:nvSpPr>
         <p:spPr>
           <a:xfrm>
-            <a:off x="1453896" y="3786759"/>
-            <a:ext cx="274320" cy="0"/>
+            <a:off x="1462462" y="3552273"/>
+            <a:ext cx="271511" cy="0"/>
           </a:xfrm>
           <a:prstGeom prst="line">
             <a:avLst/>
@@ -6180,8 +6180,8 @@
         </p:nvSpPr>
         <p:spPr>
           <a:xfrm>
-            <a:off x="1453896" y="4061079"/>
-            <a:ext cx="274320" cy="0"/>
+            <a:off x="1462462" y="3823784"/>
+            <a:ext cx="271511" cy="0"/>
           </a:xfrm>
           <a:prstGeom prst="line">
             <a:avLst/>
@@ -6203,8 +6203,8 @@
         </p:nvSpPr>
         <p:spPr>
           <a:xfrm>
-            <a:off x="1892808" y="1592199"/>
-            <a:ext cx="274320" cy="2743200"/>
+            <a:off x="1896881" y="1380182"/>
+            <a:ext cx="271511" cy="2715113"/>
           </a:xfrm>
           <a:prstGeom prst="rect">
             <a:avLst/>
@@ -6228,8 +6228,8 @@
         </p:nvSpPr>
         <p:spPr>
           <a:xfrm>
-            <a:off x="1892808" y="1866519"/>
-            <a:ext cx="274320" cy="0"/>
+            <a:off x="1896881" y="1651694"/>
+            <a:ext cx="271511" cy="0"/>
           </a:xfrm>
           <a:prstGeom prst="line">
             <a:avLst/>
@@ -6251,8 +6251,8 @@
         </p:nvSpPr>
         <p:spPr>
           <a:xfrm>
-            <a:off x="1892808" y="2140839"/>
-            <a:ext cx="274320" cy="0"/>
+            <a:off x="1896881" y="1923205"/>
+            <a:ext cx="271511" cy="0"/>
           </a:xfrm>
           <a:prstGeom prst="line">
             <a:avLst/>
@@ -6274,8 +6274,8 @@
         </p:nvSpPr>
         <p:spPr>
           <a:xfrm>
-            <a:off x="1892808" y="2415159"/>
-            <a:ext cx="274320" cy="0"/>
+            <a:off x="1896881" y="2194716"/>
+            <a:ext cx="271511" cy="0"/>
           </a:xfrm>
           <a:prstGeom prst="line">
             <a:avLst/>
@@ -6297,8 +6297,8 @@
         </p:nvSpPr>
         <p:spPr>
           <a:xfrm>
-            <a:off x="1892808" y="2689479"/>
-            <a:ext cx="274320" cy="0"/>
+            <a:off x="1896881" y="2466228"/>
+            <a:ext cx="271511" cy="0"/>
           </a:xfrm>
           <a:prstGeom prst="line">
             <a:avLst/>
@@ -6320,8 +6320,8 @@
         </p:nvSpPr>
         <p:spPr>
           <a:xfrm>
-            <a:off x="1892808" y="2963799"/>
-            <a:ext cx="274320" cy="0"/>
+            <a:off x="1896881" y="2737739"/>
+            <a:ext cx="271511" cy="0"/>
           </a:xfrm>
           <a:prstGeom prst="line">
             <a:avLst/>
@@ -6343,8 +6343,8 @@
         </p:nvSpPr>
         <p:spPr>
           <a:xfrm>
-            <a:off x="1892808" y="3238119"/>
-            <a:ext cx="274320" cy="0"/>
+            <a:off x="1896881" y="3009250"/>
+            <a:ext cx="271511" cy="0"/>
           </a:xfrm>
           <a:prstGeom prst="line">
             <a:avLst/>
@@ -6366,8 +6366,8 @@
         </p:nvSpPr>
         <p:spPr>
           <a:xfrm>
-            <a:off x="1892808" y="3512439"/>
-            <a:ext cx="274320" cy="0"/>
+            <a:off x="1896881" y="3280762"/>
+            <a:ext cx="271511" cy="0"/>
           </a:xfrm>
           <a:prstGeom prst="line">
             <a:avLst/>
@@ -6389,8 +6389,8 @@
         </p:nvSpPr>
         <p:spPr>
           <a:xfrm>
-            <a:off x="1892808" y="3786759"/>
-            <a:ext cx="274320" cy="0"/>
+            <a:off x="1896881" y="3552273"/>
+            <a:ext cx="271511" cy="0"/>
           </a:xfrm>
           <a:prstGeom prst="line">
             <a:avLst/>
@@ -6412,8 +6412,8 @@
         </p:nvSpPr>
         <p:spPr>
           <a:xfrm>
-            <a:off x="1892808" y="4061079"/>
-            <a:ext cx="274320" cy="0"/>
+            <a:off x="1896881" y="3823784"/>
+            <a:ext cx="271511" cy="0"/>
           </a:xfrm>
           <a:prstGeom prst="line">
             <a:avLst/>
@@ -6435,8 +6435,8 @@
         </p:nvSpPr>
         <p:spPr>
           <a:xfrm>
-            <a:off x="2331720" y="1592199"/>
-            <a:ext cx="274320" cy="2743200"/>
+            <a:off x="2331299" y="1380182"/>
+            <a:ext cx="271511" cy="2715113"/>
           </a:xfrm>
           <a:prstGeom prst="rect">
             <a:avLst/>
@@ -6460,8 +6460,8 @@
         </p:nvSpPr>
         <p:spPr>
           <a:xfrm>
-            <a:off x="2331720" y="1866519"/>
-            <a:ext cx="274320" cy="0"/>
+            <a:off x="2331299" y="1651694"/>
+            <a:ext cx="271511" cy="0"/>
           </a:xfrm>
           <a:prstGeom prst="line">
             <a:avLst/>
@@ -6483,8 +6483,8 @@
         </p:nvSpPr>
         <p:spPr>
           <a:xfrm>
-            <a:off x="2331720" y="2140839"/>
-            <a:ext cx="274320" cy="0"/>
+            <a:off x="2331299" y="1923205"/>
+            <a:ext cx="271511" cy="0"/>
           </a:xfrm>
           <a:prstGeom prst="line">
             <a:avLst/>
@@ -6506,8 +6506,8 @@
         </p:nvSpPr>
         <p:spPr>
           <a:xfrm>
-            <a:off x="2331720" y="2415159"/>
-            <a:ext cx="274320" cy="0"/>
+            <a:off x="2331299" y="2194716"/>
+            <a:ext cx="271511" cy="0"/>
           </a:xfrm>
           <a:prstGeom prst="line">
             <a:avLst/>
@@ -6529,8 +6529,8 @@
         </p:nvSpPr>
         <p:spPr>
           <a:xfrm>
-            <a:off x="2331720" y="2689479"/>
-            <a:ext cx="274320" cy="0"/>
+            <a:off x="2331299" y="2466228"/>
+            <a:ext cx="271511" cy="0"/>
           </a:xfrm>
           <a:prstGeom prst="line">
             <a:avLst/>
@@ -6552,8 +6552,8 @@
         </p:nvSpPr>
         <p:spPr>
           <a:xfrm>
-            <a:off x="2331720" y="2963799"/>
-            <a:ext cx="274320" cy="0"/>
+            <a:off x="2331299" y="2737739"/>
+            <a:ext cx="271511" cy="0"/>
           </a:xfrm>
           <a:prstGeom prst="line">
             <a:avLst/>
@@ -6575,8 +6575,8 @@
         </p:nvSpPr>
         <p:spPr>
           <a:xfrm>
-            <a:off x="2331720" y="3238119"/>
-            <a:ext cx="274320" cy="0"/>
+            <a:off x="2331299" y="3009250"/>
+            <a:ext cx="271511" cy="0"/>
           </a:xfrm>
           <a:prstGeom prst="line">
             <a:avLst/>
@@ -6598,8 +6598,8 @@
         </p:nvSpPr>
         <p:spPr>
           <a:xfrm>
-            <a:off x="2331720" y="3512439"/>
-            <a:ext cx="274320" cy="0"/>
+            <a:off x="2331299" y="3280762"/>
+            <a:ext cx="271511" cy="0"/>
           </a:xfrm>
           <a:prstGeom prst="line">
             <a:avLst/>
@@ -6621,8 +6621,8 @@
         </p:nvSpPr>
         <p:spPr>
           <a:xfrm>
-            <a:off x="2331720" y="3786759"/>
-            <a:ext cx="274320" cy="0"/>
+            <a:off x="2331299" y="3552273"/>
+            <a:ext cx="271511" cy="0"/>
           </a:xfrm>
           <a:prstGeom prst="line">
             <a:avLst/>
@@ -6644,8 +6644,8 @@
         </p:nvSpPr>
         <p:spPr>
           <a:xfrm>
-            <a:off x="2331720" y="4061079"/>
-            <a:ext cx="274320" cy="0"/>
+            <a:off x="2331299" y="3823784"/>
+            <a:ext cx="271511" cy="0"/>
           </a:xfrm>
           <a:prstGeom prst="line">
             <a:avLst/>
@@ -6667,8 +6667,8 @@
         </p:nvSpPr>
         <p:spPr>
           <a:xfrm>
-            <a:off x="2770632" y="3992499"/>
-            <a:ext cx="274320" cy="274320"/>
+            <a:off x="2765717" y="3755907"/>
+            <a:ext cx="271511" cy="271511"/>
           </a:xfrm>
           <a:prstGeom prst="rect">
             <a:avLst/>
@@ -6692,8 +6692,8 @@
         </p:nvSpPr>
         <p:spPr>
           <a:xfrm>
-            <a:off x="2770632" y="3649599"/>
-            <a:ext cx="274320" cy="274320"/>
+            <a:off x="2765717" y="3416517"/>
+            <a:ext cx="271511" cy="271511"/>
           </a:xfrm>
           <a:prstGeom prst="rect">
             <a:avLst/>
@@ -6717,8 +6717,8 @@
         </p:nvSpPr>
         <p:spPr>
           <a:xfrm>
-            <a:off x="2770632" y="3306699"/>
-            <a:ext cx="274320" cy="274320"/>
+            <a:off x="2765717" y="3077128"/>
+            <a:ext cx="271511" cy="271511"/>
           </a:xfrm>
           <a:prstGeom prst="rect">
             <a:avLst/>
@@ -6742,8 +6742,8 @@
         </p:nvSpPr>
         <p:spPr>
           <a:xfrm>
-            <a:off x="2770632" y="2963799"/>
-            <a:ext cx="274320" cy="274320"/>
+            <a:off x="2765717" y="2737739"/>
+            <a:ext cx="271511" cy="271511"/>
           </a:xfrm>
           <a:prstGeom prst="rect">
             <a:avLst/>
@@ -6767,7 +6767,7 @@
         </p:nvSpPr>
         <p:spPr>
           <a:xfrm>
-            <a:off x="548640" y="1592199"/>
+            <a:off x="548640" y="1380182"/>
             <a:ext cx="9144" cy="9144"/>
           </a:xfrm>
           <a:prstGeom prst="rect">
@@ -6796,7 +6796,7 @@
         </p:nvSpPr>
         <p:spPr>
           <a:xfrm>
-            <a:off x="548640" y="4674870"/>
+            <a:off x="548640" y="4222750"/>
             <a:ext cx="3483864" cy="445770"/>
           </a:xfrm>
           <a:prstGeom prst="rect">
@@ -6835,8 +6835,8 @@
         </p:nvSpPr>
         <p:spPr>
           <a:xfrm>
-            <a:off x="5257800" y="1592199"/>
-            <a:ext cx="274320" cy="2743200"/>
+            <a:off x="5266366" y="1380182"/>
+            <a:ext cx="271511" cy="2715113"/>
           </a:xfrm>
           <a:prstGeom prst="rect">
             <a:avLst/>
@@ -6860,8 +6860,8 @@
         </p:nvSpPr>
         <p:spPr>
           <a:xfrm>
-            <a:off x="5257800" y="1866519"/>
-            <a:ext cx="274320" cy="0"/>
+            <a:off x="5266366" y="1651694"/>
+            <a:ext cx="271511" cy="0"/>
           </a:xfrm>
           <a:prstGeom prst="line">
             <a:avLst/>
@@ -6883,8 +6883,8 @@
         </p:nvSpPr>
         <p:spPr>
           <a:xfrm>
-            <a:off x="5257800" y="2140839"/>
-            <a:ext cx="274320" cy="0"/>
+            <a:off x="5266366" y="1923205"/>
+            <a:ext cx="271511" cy="0"/>
           </a:xfrm>
           <a:prstGeom prst="line">
             <a:avLst/>
@@ -6906,8 +6906,8 @@
         </p:nvSpPr>
         <p:spPr>
           <a:xfrm>
-            <a:off x="5257800" y="2415159"/>
-            <a:ext cx="274320" cy="0"/>
+            <a:off x="5266366" y="2194716"/>
+            <a:ext cx="271511" cy="0"/>
           </a:xfrm>
           <a:prstGeom prst="line">
             <a:avLst/>
@@ -6929,8 +6929,8 @@
         </p:nvSpPr>
         <p:spPr>
           <a:xfrm>
-            <a:off x="5257800" y="2689479"/>
-            <a:ext cx="274320" cy="0"/>
+            <a:off x="5266366" y="2466228"/>
+            <a:ext cx="271511" cy="0"/>
           </a:xfrm>
           <a:prstGeom prst="line">
             <a:avLst/>
@@ -6952,8 +6952,8 @@
         </p:nvSpPr>
         <p:spPr>
           <a:xfrm>
-            <a:off x="5257800" y="2963799"/>
-            <a:ext cx="274320" cy="0"/>
+            <a:off x="5266366" y="2737739"/>
+            <a:ext cx="271511" cy="0"/>
           </a:xfrm>
           <a:prstGeom prst="line">
             <a:avLst/>
@@ -6975,8 +6975,8 @@
         </p:nvSpPr>
         <p:spPr>
           <a:xfrm>
-            <a:off x="5257800" y="3238119"/>
-            <a:ext cx="274320" cy="0"/>
+            <a:off x="5266366" y="3009250"/>
+            <a:ext cx="271511" cy="0"/>
           </a:xfrm>
           <a:prstGeom prst="line">
             <a:avLst/>
@@ -6998,8 +6998,8 @@
         </p:nvSpPr>
         <p:spPr>
           <a:xfrm>
-            <a:off x="5257800" y="3512439"/>
-            <a:ext cx="274320" cy="0"/>
+            <a:off x="5266366" y="3280762"/>
+            <a:ext cx="271511" cy="0"/>
           </a:xfrm>
           <a:prstGeom prst="line">
             <a:avLst/>
@@ -7021,8 +7021,8 @@
         </p:nvSpPr>
         <p:spPr>
           <a:xfrm>
-            <a:off x="5257800" y="3786759"/>
-            <a:ext cx="274320" cy="0"/>
+            <a:off x="5266366" y="3552273"/>
+            <a:ext cx="271511" cy="0"/>
           </a:xfrm>
           <a:prstGeom prst="line">
             <a:avLst/>
@@ -7044,8 +7044,8 @@
         </p:nvSpPr>
         <p:spPr>
           <a:xfrm>
-            <a:off x="5257800" y="4061079"/>
-            <a:ext cx="274320" cy="0"/>
+            <a:off x="5266366" y="3823784"/>
+            <a:ext cx="271511" cy="0"/>
           </a:xfrm>
           <a:prstGeom prst="line">
             <a:avLst/>
@@ -7067,8 +7067,8 @@
         </p:nvSpPr>
         <p:spPr>
           <a:xfrm>
-            <a:off x="5696712" y="1592199"/>
-            <a:ext cx="274320" cy="2743200"/>
+            <a:off x="5700785" y="1380182"/>
+            <a:ext cx="271511" cy="2715113"/>
           </a:xfrm>
           <a:prstGeom prst="rect">
             <a:avLst/>
@@ -7092,8 +7092,8 @@
         </p:nvSpPr>
         <p:spPr>
           <a:xfrm>
-            <a:off x="5696712" y="1866519"/>
-            <a:ext cx="274320" cy="0"/>
+            <a:off x="5700785" y="1651694"/>
+            <a:ext cx="271511" cy="0"/>
           </a:xfrm>
           <a:prstGeom prst="line">
             <a:avLst/>
@@ -7115,8 +7115,8 @@
         </p:nvSpPr>
         <p:spPr>
           <a:xfrm>
-            <a:off x="5696712" y="2140839"/>
-            <a:ext cx="274320" cy="0"/>
+            <a:off x="5700785" y="1923205"/>
+            <a:ext cx="271511" cy="0"/>
           </a:xfrm>
           <a:prstGeom prst="line">
             <a:avLst/>
@@ -7138,8 +7138,8 @@
         </p:nvSpPr>
         <p:spPr>
           <a:xfrm>
-            <a:off x="5696712" y="2415159"/>
-            <a:ext cx="274320" cy="0"/>
+            <a:off x="5700785" y="2194716"/>
+            <a:ext cx="271511" cy="0"/>
           </a:xfrm>
           <a:prstGeom prst="line">
             <a:avLst/>
@@ -7161,8 +7161,8 @@
         </p:nvSpPr>
         <p:spPr>
           <a:xfrm>
-            <a:off x="5696712" y="2689479"/>
-            <a:ext cx="274320" cy="0"/>
+            <a:off x="5700785" y="2466228"/>
+            <a:ext cx="271511" cy="0"/>
           </a:xfrm>
           <a:prstGeom prst="line">
             <a:avLst/>
@@ -7184,8 +7184,8 @@
         </p:nvSpPr>
         <p:spPr>
           <a:xfrm>
-            <a:off x="5696712" y="2963799"/>
-            <a:ext cx="274320" cy="0"/>
+            <a:off x="5700785" y="2737739"/>
+            <a:ext cx="271511" cy="0"/>
           </a:xfrm>
           <a:prstGeom prst="line">
             <a:avLst/>
@@ -7207,8 +7207,8 @@
         </p:nvSpPr>
         <p:spPr>
           <a:xfrm>
-            <a:off x="5696712" y="3238119"/>
-            <a:ext cx="274320" cy="0"/>
+            <a:off x="5700785" y="3009250"/>
+            <a:ext cx="271511" cy="0"/>
           </a:xfrm>
           <a:prstGeom prst="line">
             <a:avLst/>
@@ -7230,8 +7230,8 @@
         </p:nvSpPr>
         <p:spPr>
           <a:xfrm>
-            <a:off x="5696712" y="3512439"/>
-            <a:ext cx="274320" cy="0"/>
+            <a:off x="5700785" y="3280762"/>
+            <a:ext cx="271511" cy="0"/>
           </a:xfrm>
           <a:prstGeom prst="line">
             <a:avLst/>
@@ -7253,8 +7253,8 @@
         </p:nvSpPr>
         <p:spPr>
           <a:xfrm>
-            <a:off x="5696712" y="3786759"/>
-            <a:ext cx="274320" cy="0"/>
+            <a:off x="5700785" y="3552273"/>
+            <a:ext cx="271511" cy="0"/>
           </a:xfrm>
           <a:prstGeom prst="line">
             <a:avLst/>
@@ -7276,8 +7276,8 @@
         </p:nvSpPr>
         <p:spPr>
           <a:xfrm>
-            <a:off x="5696712" y="4061079"/>
-            <a:ext cx="274320" cy="0"/>
+            <a:off x="5700785" y="3823784"/>
+            <a:ext cx="271511" cy="0"/>
           </a:xfrm>
           <a:prstGeom prst="line">
             <a:avLst/>
@@ -7299,8 +7299,8 @@
         </p:nvSpPr>
         <p:spPr>
           <a:xfrm>
-            <a:off x="6135624" y="1592199"/>
-            <a:ext cx="274320" cy="2743200"/>
+            <a:off x="6135203" y="1380182"/>
+            <a:ext cx="271511" cy="2715113"/>
           </a:xfrm>
           <a:prstGeom prst="rect">
             <a:avLst/>
@@ -7324,8 +7324,8 @@
         </p:nvSpPr>
         <p:spPr>
           <a:xfrm>
-            <a:off x="6135624" y="1866519"/>
-            <a:ext cx="274320" cy="0"/>
+            <a:off x="6135203" y="1651694"/>
+            <a:ext cx="271511" cy="0"/>
           </a:xfrm>
           <a:prstGeom prst="line">
             <a:avLst/>
@@ -7347,8 +7347,8 @@
         </p:nvSpPr>
         <p:spPr>
           <a:xfrm>
-            <a:off x="6135624" y="2140839"/>
-            <a:ext cx="274320" cy="0"/>
+            <a:off x="6135203" y="1923205"/>
+            <a:ext cx="271511" cy="0"/>
           </a:xfrm>
           <a:prstGeom prst="line">
             <a:avLst/>
@@ -7370,8 +7370,8 @@
         </p:nvSpPr>
         <p:spPr>
           <a:xfrm>
-            <a:off x="6135624" y="2415159"/>
-            <a:ext cx="274320" cy="0"/>
+            <a:off x="6135203" y="2194716"/>
+            <a:ext cx="271511" cy="0"/>
           </a:xfrm>
           <a:prstGeom prst="line">
             <a:avLst/>
@@ -7393,8 +7393,8 @@
         </p:nvSpPr>
         <p:spPr>
           <a:xfrm>
-            <a:off x="6135624" y="2689479"/>
-            <a:ext cx="274320" cy="0"/>
+            <a:off x="6135203" y="2466228"/>
+            <a:ext cx="271511" cy="0"/>
           </a:xfrm>
           <a:prstGeom prst="line">
             <a:avLst/>
@@ -7416,8 +7416,8 @@
         </p:nvSpPr>
         <p:spPr>
           <a:xfrm>
-            <a:off x="6135624" y="2963799"/>
-            <a:ext cx="274320" cy="0"/>
+            <a:off x="6135203" y="2737739"/>
+            <a:ext cx="271511" cy="0"/>
           </a:xfrm>
           <a:prstGeom prst="line">
             <a:avLst/>
@@ -7439,8 +7439,8 @@
         </p:nvSpPr>
         <p:spPr>
           <a:xfrm>
-            <a:off x="6135624" y="3238119"/>
-            <a:ext cx="274320" cy="0"/>
+            <a:off x="6135203" y="3009250"/>
+            <a:ext cx="271511" cy="0"/>
           </a:xfrm>
           <a:prstGeom prst="line">
             <a:avLst/>
@@ -7462,8 +7462,8 @@
         </p:nvSpPr>
         <p:spPr>
           <a:xfrm>
-            <a:off x="6135624" y="3512439"/>
-            <a:ext cx="274320" cy="0"/>
+            <a:off x="6135203" y="3280762"/>
+            <a:ext cx="271511" cy="0"/>
           </a:xfrm>
           <a:prstGeom prst="line">
             <a:avLst/>
@@ -7485,8 +7485,8 @@
         </p:nvSpPr>
         <p:spPr>
           <a:xfrm>
-            <a:off x="6135624" y="3786759"/>
-            <a:ext cx="274320" cy="0"/>
+            <a:off x="6135203" y="3552273"/>
+            <a:ext cx="271511" cy="0"/>
           </a:xfrm>
           <a:prstGeom prst="line">
             <a:avLst/>
@@ -7508,8 +7508,8 @@
         </p:nvSpPr>
         <p:spPr>
           <a:xfrm>
-            <a:off x="6135624" y="4061079"/>
-            <a:ext cx="274320" cy="0"/>
+            <a:off x="6135203" y="3823784"/>
+            <a:ext cx="271511" cy="0"/>
           </a:xfrm>
           <a:prstGeom prst="line">
             <a:avLst/>
@@ -7531,8 +7531,8 @@
         </p:nvSpPr>
         <p:spPr>
           <a:xfrm>
-            <a:off x="6574536" y="3992499"/>
-            <a:ext cx="274320" cy="274320"/>
+            <a:off x="6569621" y="3755907"/>
+            <a:ext cx="271511" cy="271511"/>
           </a:xfrm>
           <a:prstGeom prst="rect">
             <a:avLst/>
@@ -7556,8 +7556,8 @@
         </p:nvSpPr>
         <p:spPr>
           <a:xfrm>
-            <a:off x="6574536" y="3649599"/>
-            <a:ext cx="274320" cy="274320"/>
+            <a:off x="6569621" y="3416517"/>
+            <a:ext cx="271511" cy="271511"/>
           </a:xfrm>
           <a:prstGeom prst="rect">
             <a:avLst/>
@@ -7581,8 +7581,8 @@
         </p:nvSpPr>
         <p:spPr>
           <a:xfrm>
-            <a:off x="6574536" y="3306699"/>
-            <a:ext cx="274320" cy="274320"/>
+            <a:off x="6569621" y="3077128"/>
+            <a:ext cx="271511" cy="271511"/>
           </a:xfrm>
           <a:prstGeom prst="rect">
             <a:avLst/>
@@ -7606,8 +7606,8 @@
         </p:nvSpPr>
         <p:spPr>
           <a:xfrm>
-            <a:off x="6574536" y="2963799"/>
-            <a:ext cx="274320" cy="274320"/>
+            <a:off x="6569621" y="2737739"/>
+            <a:ext cx="271511" cy="271511"/>
           </a:xfrm>
           <a:prstGeom prst="rect">
             <a:avLst/>
@@ -7631,8 +7631,8 @@
         </p:nvSpPr>
         <p:spPr>
           <a:xfrm>
-            <a:off x="6574536" y="2620899"/>
-            <a:ext cx="274320" cy="274320"/>
+            <a:off x="6569621" y="2398350"/>
+            <a:ext cx="271511" cy="271511"/>
           </a:xfrm>
           <a:prstGeom prst="rect">
             <a:avLst/>
@@ -7656,7 +7656,7 @@
         </p:nvSpPr>
         <p:spPr>
           <a:xfrm>
-            <a:off x="4352544" y="1592199"/>
+            <a:off x="4352544" y="1380182"/>
             <a:ext cx="9144" cy="9144"/>
           </a:xfrm>
           <a:prstGeom prst="rect">
@@ -7685,7 +7685,7 @@
         </p:nvSpPr>
         <p:spPr>
           <a:xfrm>
-            <a:off x="4352544" y="4674870"/>
+            <a:off x="4352544" y="4222750"/>
             <a:ext cx="3483864" cy="445770"/>
           </a:xfrm>
           <a:prstGeom prst="rect">
@@ -7724,8 +7724,8 @@
         </p:nvSpPr>
         <p:spPr>
           <a:xfrm>
-            <a:off x="8842248" y="1592199"/>
-            <a:ext cx="274320" cy="2743200"/>
+            <a:off x="8853061" y="1380182"/>
+            <a:ext cx="271511" cy="2715113"/>
           </a:xfrm>
           <a:prstGeom prst="rect">
             <a:avLst/>
@@ -7749,8 +7749,8 @@
         </p:nvSpPr>
         <p:spPr>
           <a:xfrm>
-            <a:off x="8842248" y="1866519"/>
-            <a:ext cx="274320" cy="0"/>
+            <a:off x="8853061" y="1651694"/>
+            <a:ext cx="271511" cy="0"/>
           </a:xfrm>
           <a:prstGeom prst="line">
             <a:avLst/>
@@ -7772,8 +7772,8 @@
         </p:nvSpPr>
         <p:spPr>
           <a:xfrm>
-            <a:off x="8842248" y="2140839"/>
-            <a:ext cx="274320" cy="0"/>
+            <a:off x="8853061" y="1923205"/>
+            <a:ext cx="271511" cy="0"/>
           </a:xfrm>
           <a:prstGeom prst="line">
             <a:avLst/>
@@ -7795,8 +7795,8 @@
         </p:nvSpPr>
         <p:spPr>
           <a:xfrm>
-            <a:off x="8842248" y="2415159"/>
-            <a:ext cx="274320" cy="0"/>
+            <a:off x="8853061" y="2194716"/>
+            <a:ext cx="271511" cy="0"/>
           </a:xfrm>
           <a:prstGeom prst="line">
             <a:avLst/>
@@ -7818,8 +7818,8 @@
         </p:nvSpPr>
         <p:spPr>
           <a:xfrm>
-            <a:off x="8842248" y="2689479"/>
-            <a:ext cx="274320" cy="0"/>
+            <a:off x="8853061" y="2466228"/>
+            <a:ext cx="271511" cy="0"/>
           </a:xfrm>
           <a:prstGeom prst="line">
             <a:avLst/>
@@ -7841,8 +7841,8 @@
         </p:nvSpPr>
         <p:spPr>
           <a:xfrm>
-            <a:off x="8842248" y="2963799"/>
-            <a:ext cx="274320" cy="0"/>
+            <a:off x="8853061" y="2737739"/>
+            <a:ext cx="271511" cy="0"/>
           </a:xfrm>
           <a:prstGeom prst="line">
             <a:avLst/>
@@ -7864,8 +7864,8 @@
         </p:nvSpPr>
         <p:spPr>
           <a:xfrm>
-            <a:off x="8842248" y="3238119"/>
-            <a:ext cx="274320" cy="0"/>
+            <a:off x="8853061" y="3009250"/>
+            <a:ext cx="271511" cy="0"/>
           </a:xfrm>
           <a:prstGeom prst="line">
             <a:avLst/>
@@ -7887,8 +7887,8 @@
         </p:nvSpPr>
         <p:spPr>
           <a:xfrm>
-            <a:off x="8842248" y="3512439"/>
-            <a:ext cx="274320" cy="0"/>
+            <a:off x="8853061" y="3280762"/>
+            <a:ext cx="271511" cy="0"/>
           </a:xfrm>
           <a:prstGeom prst="line">
             <a:avLst/>
@@ -7910,8 +7910,8 @@
         </p:nvSpPr>
         <p:spPr>
           <a:xfrm>
-            <a:off x="8842248" y="3786759"/>
-            <a:ext cx="274320" cy="0"/>
+            <a:off x="8853061" y="3552273"/>
+            <a:ext cx="271511" cy="0"/>
           </a:xfrm>
           <a:prstGeom prst="line">
             <a:avLst/>
@@ -7933,8 +7933,8 @@
         </p:nvSpPr>
         <p:spPr>
           <a:xfrm>
-            <a:off x="8842248" y="4061079"/>
-            <a:ext cx="274320" cy="0"/>
+            <a:off x="8853061" y="3823784"/>
+            <a:ext cx="271511" cy="0"/>
           </a:xfrm>
           <a:prstGeom prst="line">
             <a:avLst/>
@@ -7956,8 +7956,8 @@
         </p:nvSpPr>
         <p:spPr>
           <a:xfrm>
-            <a:off x="9281160" y="1592199"/>
-            <a:ext cx="274320" cy="2743200"/>
+            <a:off x="9287479" y="1380182"/>
+            <a:ext cx="271511" cy="2715113"/>
           </a:xfrm>
           <a:prstGeom prst="rect">
             <a:avLst/>
@@ -7981,8 +7981,8 @@
         </p:nvSpPr>
         <p:spPr>
           <a:xfrm>
-            <a:off x="9281160" y="1866519"/>
-            <a:ext cx="274320" cy="0"/>
+            <a:off x="9287479" y="1651694"/>
+            <a:ext cx="271511" cy="0"/>
           </a:xfrm>
           <a:prstGeom prst="line">
             <a:avLst/>
@@ -8004,8 +8004,8 @@
         </p:nvSpPr>
         <p:spPr>
           <a:xfrm>
-            <a:off x="9281160" y="2140839"/>
-            <a:ext cx="274320" cy="0"/>
+            <a:off x="9287479" y="1923205"/>
+            <a:ext cx="271511" cy="0"/>
           </a:xfrm>
           <a:prstGeom prst="line">
             <a:avLst/>
@@ -8027,8 +8027,8 @@
         </p:nvSpPr>
         <p:spPr>
           <a:xfrm>
-            <a:off x="9281160" y="2415159"/>
-            <a:ext cx="274320" cy="0"/>
+            <a:off x="9287479" y="2194716"/>
+            <a:ext cx="271511" cy="0"/>
           </a:xfrm>
           <a:prstGeom prst="line">
             <a:avLst/>
@@ -8050,8 +8050,8 @@
         </p:nvSpPr>
         <p:spPr>
           <a:xfrm>
-            <a:off x="9281160" y="2689479"/>
-            <a:ext cx="274320" cy="0"/>
+            <a:off x="9287479" y="2466228"/>
+            <a:ext cx="271511" cy="0"/>
           </a:xfrm>
           <a:prstGeom prst="line">
             <a:avLst/>
@@ -8073,8 +8073,8 @@
         </p:nvSpPr>
         <p:spPr>
           <a:xfrm>
-            <a:off x="9281160" y="2963799"/>
-            <a:ext cx="274320" cy="0"/>
+            <a:off x="9287479" y="2737739"/>
+            <a:ext cx="271511" cy="0"/>
           </a:xfrm>
           <a:prstGeom prst="line">
             <a:avLst/>
@@ -8096,8 +8096,8 @@
         </p:nvSpPr>
         <p:spPr>
           <a:xfrm>
-            <a:off x="9281160" y="3238119"/>
-            <a:ext cx="274320" cy="0"/>
+            <a:off x="9287479" y="3009250"/>
+            <a:ext cx="271511" cy="0"/>
           </a:xfrm>
           <a:prstGeom prst="line">
             <a:avLst/>
@@ -8119,8 +8119,8 @@
         </p:nvSpPr>
         <p:spPr>
           <a:xfrm>
-            <a:off x="9281160" y="3512439"/>
-            <a:ext cx="274320" cy="0"/>
+            <a:off x="9287479" y="3280762"/>
+            <a:ext cx="271511" cy="0"/>
           </a:xfrm>
           <a:prstGeom prst="line">
             <a:avLst/>
@@ -8142,8 +8142,8 @@
         </p:nvSpPr>
         <p:spPr>
           <a:xfrm>
-            <a:off x="9281160" y="3786759"/>
-            <a:ext cx="274320" cy="0"/>
+            <a:off x="9287479" y="3552273"/>
+            <a:ext cx="271511" cy="0"/>
           </a:xfrm>
           <a:prstGeom prst="line">
             <a:avLst/>
@@ -8165,8 +8165,8 @@
         </p:nvSpPr>
         <p:spPr>
           <a:xfrm>
-            <a:off x="9281160" y="4061079"/>
-            <a:ext cx="274320" cy="0"/>
+            <a:off x="9287479" y="3823784"/>
+            <a:ext cx="271511" cy="0"/>
           </a:xfrm>
           <a:prstGeom prst="line">
             <a:avLst/>
@@ -8188,8 +8188,8 @@
         </p:nvSpPr>
         <p:spPr>
           <a:xfrm>
-            <a:off x="9720072" y="1592199"/>
-            <a:ext cx="274320" cy="2743200"/>
+            <a:off x="9721898" y="1380182"/>
+            <a:ext cx="271511" cy="2715113"/>
           </a:xfrm>
           <a:prstGeom prst="rect">
             <a:avLst/>
@@ -8213,8 +8213,8 @@
         </p:nvSpPr>
         <p:spPr>
           <a:xfrm>
-            <a:off x="9720072" y="1866519"/>
-            <a:ext cx="274320" cy="0"/>
+            <a:off x="9721898" y="1651694"/>
+            <a:ext cx="271511" cy="0"/>
           </a:xfrm>
           <a:prstGeom prst="line">
             <a:avLst/>
@@ -8236,8 +8236,8 @@
         </p:nvSpPr>
         <p:spPr>
           <a:xfrm>
-            <a:off x="9720072" y="2140839"/>
-            <a:ext cx="274320" cy="0"/>
+            <a:off x="9721898" y="1923205"/>
+            <a:ext cx="271511" cy="0"/>
           </a:xfrm>
           <a:prstGeom prst="line">
             <a:avLst/>
@@ -8259,8 +8259,8 @@
         </p:nvSpPr>
         <p:spPr>
           <a:xfrm>
-            <a:off x="9720072" y="2415159"/>
-            <a:ext cx="274320" cy="0"/>
+            <a:off x="9721898" y="2194716"/>
+            <a:ext cx="271511" cy="0"/>
           </a:xfrm>
           <a:prstGeom prst="line">
             <a:avLst/>
@@ -8282,8 +8282,8 @@
         </p:nvSpPr>
         <p:spPr>
           <a:xfrm>
-            <a:off x="9720072" y="2689479"/>
-            <a:ext cx="274320" cy="0"/>
+            <a:off x="9721898" y="2466228"/>
+            <a:ext cx="271511" cy="0"/>
           </a:xfrm>
           <a:prstGeom prst="line">
             <a:avLst/>
@@ -8305,8 +8305,8 @@
         </p:nvSpPr>
         <p:spPr>
           <a:xfrm>
-            <a:off x="9720072" y="2963799"/>
-            <a:ext cx="274320" cy="0"/>
+            <a:off x="9721898" y="2737739"/>
+            <a:ext cx="271511" cy="0"/>
           </a:xfrm>
           <a:prstGeom prst="line">
             <a:avLst/>
@@ -8328,8 +8328,8 @@
         </p:nvSpPr>
         <p:spPr>
           <a:xfrm>
-            <a:off x="9720072" y="3238119"/>
-            <a:ext cx="274320" cy="0"/>
+            <a:off x="9721898" y="3009250"/>
+            <a:ext cx="271511" cy="0"/>
           </a:xfrm>
           <a:prstGeom prst="line">
             <a:avLst/>
@@ -8351,8 +8351,8 @@
         </p:nvSpPr>
         <p:spPr>
           <a:xfrm>
-            <a:off x="9720072" y="3512439"/>
-            <a:ext cx="274320" cy="0"/>
+            <a:off x="9721898" y="3280762"/>
+            <a:ext cx="271511" cy="0"/>
           </a:xfrm>
           <a:prstGeom prst="line">
             <a:avLst/>
@@ -8374,8 +8374,8 @@
         </p:nvSpPr>
         <p:spPr>
           <a:xfrm>
-            <a:off x="9720072" y="3786759"/>
-            <a:ext cx="274320" cy="0"/>
+            <a:off x="9721898" y="3552273"/>
+            <a:ext cx="271511" cy="0"/>
           </a:xfrm>
           <a:prstGeom prst="line">
             <a:avLst/>
@@ -8397,8 +8397,8 @@
         </p:nvSpPr>
         <p:spPr>
           <a:xfrm>
-            <a:off x="9720072" y="4061079"/>
-            <a:ext cx="274320" cy="0"/>
+            <a:off x="9721898" y="3823784"/>
+            <a:ext cx="271511" cy="0"/>
           </a:xfrm>
           <a:prstGeom prst="line">
             <a:avLst/>
@@ -8420,8 +8420,8 @@
         </p:nvSpPr>
         <p:spPr>
           <a:xfrm>
-            <a:off x="10158984" y="1592199"/>
-            <a:ext cx="274320" cy="2743200"/>
+            <a:off x="10156316" y="1380182"/>
+            <a:ext cx="271511" cy="2715113"/>
           </a:xfrm>
           <a:prstGeom prst="rect">
             <a:avLst/>
@@ -8445,8 +8445,8 @@
         </p:nvSpPr>
         <p:spPr>
           <a:xfrm>
-            <a:off x="10158984" y="1866519"/>
-            <a:ext cx="274320" cy="0"/>
+            <a:off x="10156316" y="1651694"/>
+            <a:ext cx="271511" cy="0"/>
           </a:xfrm>
           <a:prstGeom prst="line">
             <a:avLst/>
@@ -8468,8 +8468,8 @@
         </p:nvSpPr>
         <p:spPr>
           <a:xfrm>
-            <a:off x="10158984" y="2140839"/>
-            <a:ext cx="274320" cy="0"/>
+            <a:off x="10156316" y="1923205"/>
+            <a:ext cx="271511" cy="0"/>
           </a:xfrm>
           <a:prstGeom prst="line">
             <a:avLst/>
@@ -8491,8 +8491,8 @@
         </p:nvSpPr>
         <p:spPr>
           <a:xfrm>
-            <a:off x="10158984" y="2415159"/>
-            <a:ext cx="274320" cy="0"/>
+            <a:off x="10156316" y="2194716"/>
+            <a:ext cx="271511" cy="0"/>
           </a:xfrm>
           <a:prstGeom prst="line">
             <a:avLst/>
@@ -8514,8 +8514,8 @@
         </p:nvSpPr>
         <p:spPr>
           <a:xfrm>
-            <a:off x="10158984" y="2689479"/>
-            <a:ext cx="274320" cy="0"/>
+            <a:off x="10156316" y="2466228"/>
+            <a:ext cx="271511" cy="0"/>
           </a:xfrm>
           <a:prstGeom prst="line">
             <a:avLst/>
@@ -8537,8 +8537,8 @@
         </p:nvSpPr>
         <p:spPr>
           <a:xfrm>
-            <a:off x="10158984" y="2963799"/>
-            <a:ext cx="274320" cy="0"/>
+            <a:off x="10156316" y="2737739"/>
+            <a:ext cx="271511" cy="0"/>
           </a:xfrm>
           <a:prstGeom prst="line">
             <a:avLst/>
@@ -8560,8 +8560,8 @@
         </p:nvSpPr>
         <p:spPr>
           <a:xfrm>
-            <a:off x="10158984" y="3238119"/>
-            <a:ext cx="274320" cy="0"/>
+            <a:off x="10156316" y="3009250"/>
+            <a:ext cx="271511" cy="0"/>
           </a:xfrm>
           <a:prstGeom prst="line">
             <a:avLst/>
@@ -8583,8 +8583,8 @@
         </p:nvSpPr>
         <p:spPr>
           <a:xfrm>
-            <a:off x="10158984" y="3512439"/>
-            <a:ext cx="274320" cy="0"/>
+            <a:off x="10156316" y="3280762"/>
+            <a:ext cx="271511" cy="0"/>
           </a:xfrm>
           <a:prstGeom prst="line">
             <a:avLst/>
@@ -8606,8 +8606,8 @@
         </p:nvSpPr>
         <p:spPr>
           <a:xfrm>
-            <a:off x="10158984" y="3786759"/>
-            <a:ext cx="274320" cy="0"/>
+            <a:off x="10156316" y="3552273"/>
+            <a:ext cx="271511" cy="0"/>
           </a:xfrm>
           <a:prstGeom prst="line">
             <a:avLst/>
@@ -8629,8 +8629,8 @@
         </p:nvSpPr>
         <p:spPr>
           <a:xfrm>
-            <a:off x="10158984" y="4061079"/>
-            <a:ext cx="274320" cy="0"/>
+            <a:off x="10156316" y="3823784"/>
+            <a:ext cx="271511" cy="0"/>
           </a:xfrm>
           <a:prstGeom prst="line">
             <a:avLst/>
@@ -8652,8 +8652,8 @@
         </p:nvSpPr>
         <p:spPr>
           <a:xfrm>
-            <a:off x="10597896" y="3992499"/>
-            <a:ext cx="274320" cy="274320"/>
+            <a:off x="10590734" y="3755907"/>
+            <a:ext cx="271511" cy="271511"/>
           </a:xfrm>
           <a:prstGeom prst="rect">
             <a:avLst/>
@@ -8677,8 +8677,8 @@
         </p:nvSpPr>
         <p:spPr>
           <a:xfrm>
-            <a:off x="10597896" y="3649599"/>
-            <a:ext cx="274320" cy="274320"/>
+            <a:off x="10590734" y="3416517"/>
+            <a:ext cx="271511" cy="271511"/>
           </a:xfrm>
           <a:prstGeom prst="rect">
             <a:avLst/>
@@ -8702,8 +8702,8 @@
         </p:nvSpPr>
         <p:spPr>
           <a:xfrm>
-            <a:off x="10597896" y="3306699"/>
-            <a:ext cx="274320" cy="274320"/>
+            <a:off x="10590734" y="3077128"/>
+            <a:ext cx="271511" cy="271511"/>
           </a:xfrm>
           <a:prstGeom prst="rect">
             <a:avLst/>
@@ -8727,8 +8727,8 @@
         </p:nvSpPr>
         <p:spPr>
           <a:xfrm>
-            <a:off x="10597896" y="2963799"/>
-            <a:ext cx="274320" cy="274320"/>
+            <a:off x="10590734" y="2737739"/>
+            <a:ext cx="271511" cy="271511"/>
           </a:xfrm>
           <a:prstGeom prst="rect">
             <a:avLst/>
@@ -8752,7 +8752,7 @@
         </p:nvSpPr>
         <p:spPr>
           <a:xfrm>
-            <a:off x="8156448" y="1592199"/>
+            <a:off x="8156448" y="1380182"/>
             <a:ext cx="9144" cy="9144"/>
           </a:xfrm>
           <a:prstGeom prst="rect">
@@ -8781,7 +8781,7 @@
         </p:nvSpPr>
         <p:spPr>
           <a:xfrm>
-            <a:off x="8156448" y="4674870"/>
+            <a:off x="8156448" y="4222750"/>
             <a:ext cx="3483864" cy="445770"/>
           </a:xfrm>
           <a:prstGeom prst="rect">
